--- a/Projeto Final - Artefatos/I2A2_Agentes_Inteligentes_Projeto_Final_MetaMind_AI_Agents.pptx
+++ b/Projeto Final - Artefatos/I2A2_Agentes_Inteligentes_Projeto_Final_MetaMind_AI_Agents.pptx
@@ -6229,7 +6229,7 @@
           <a:p>
             <a:fld id="{AB5B7BA8-EC9D-4768-84BF-EB4326C38B13}" type="datetimeFigureOut">
               <a:rPr lang="pt-BR" smtClean="0"/>
-              <a:t>14/10/2025</a:t>
+              <a:t>28/10/2025</a:t>
             </a:fld>
             <a:endParaRPr lang="pt-BR"/>
           </a:p>
@@ -6427,7 +6427,7 @@
           <a:p>
             <a:fld id="{AB5B7BA8-EC9D-4768-84BF-EB4326C38B13}" type="datetimeFigureOut">
               <a:rPr lang="pt-BR" smtClean="0"/>
-              <a:t>14/10/2025</a:t>
+              <a:t>28/10/2025</a:t>
             </a:fld>
             <a:endParaRPr lang="pt-BR"/>
           </a:p>
@@ -6635,7 +6635,7 @@
           <a:p>
             <a:fld id="{AB5B7BA8-EC9D-4768-84BF-EB4326C38B13}" type="datetimeFigureOut">
               <a:rPr lang="pt-BR" smtClean="0"/>
-              <a:t>14/10/2025</a:t>
+              <a:t>28/10/2025</a:t>
             </a:fld>
             <a:endParaRPr lang="pt-BR"/>
           </a:p>
@@ -6839,7 +6839,7 @@
           <a:p>
             <a:fld id="{F0E51C7C-CEA3-4CAA-BE4B-344879E7C377}" type="datetimeFigureOut">
               <a:rPr lang="de-DE" smtClean="0"/>
-              <a:t>14.10.2025</a:t>
+              <a:t>28.10.2025</a:t>
             </a:fld>
             <a:endParaRPr lang="de-DE"/>
           </a:p>
@@ -7009,7 +7009,7 @@
           <a:p>
             <a:fld id="{F0E51C7C-CEA3-4CAA-BE4B-344879E7C377}" type="datetimeFigureOut">
               <a:rPr lang="de-DE" smtClean="0"/>
-              <a:t>14.10.2025</a:t>
+              <a:t>28.10.2025</a:t>
             </a:fld>
             <a:endParaRPr lang="de-DE"/>
           </a:p>
@@ -7255,7 +7255,7 @@
           <a:p>
             <a:fld id="{F0E51C7C-CEA3-4CAA-BE4B-344879E7C377}" type="datetimeFigureOut">
               <a:rPr lang="de-DE" smtClean="0"/>
-              <a:t>14.10.2025</a:t>
+              <a:t>28.10.2025</a:t>
             </a:fld>
             <a:endParaRPr lang="de-DE"/>
           </a:p>
@@ -7487,7 +7487,7 @@
           <a:p>
             <a:fld id="{F0E51C7C-CEA3-4CAA-BE4B-344879E7C377}" type="datetimeFigureOut">
               <a:rPr lang="de-DE" smtClean="0"/>
-              <a:t>14.10.2025</a:t>
+              <a:t>28.10.2025</a:t>
             </a:fld>
             <a:endParaRPr lang="de-DE"/>
           </a:p>
@@ -7854,7 +7854,7 @@
           <a:p>
             <a:fld id="{F0E51C7C-CEA3-4CAA-BE4B-344879E7C377}" type="datetimeFigureOut">
               <a:rPr lang="de-DE" smtClean="0"/>
-              <a:t>14.10.2025</a:t>
+              <a:t>28.10.2025</a:t>
             </a:fld>
             <a:endParaRPr lang="de-DE"/>
           </a:p>
@@ -7972,7 +7972,7 @@
           <a:p>
             <a:fld id="{F0E51C7C-CEA3-4CAA-BE4B-344879E7C377}" type="datetimeFigureOut">
               <a:rPr lang="de-DE" smtClean="0"/>
-              <a:t>14.10.2025</a:t>
+              <a:t>28.10.2025</a:t>
             </a:fld>
             <a:endParaRPr lang="de-DE"/>
           </a:p>
@@ -8067,7 +8067,7 @@
           <a:p>
             <a:fld id="{F0E51C7C-CEA3-4CAA-BE4B-344879E7C377}" type="datetimeFigureOut">
               <a:rPr lang="de-DE" smtClean="0"/>
-              <a:t>14.10.2025</a:t>
+              <a:t>28.10.2025</a:t>
             </a:fld>
             <a:endParaRPr lang="de-DE"/>
           </a:p>
@@ -8344,7 +8344,7 @@
           <a:p>
             <a:fld id="{F0E51C7C-CEA3-4CAA-BE4B-344879E7C377}" type="datetimeFigureOut">
               <a:rPr lang="de-DE" smtClean="0"/>
-              <a:t>14.10.2025</a:t>
+              <a:t>28.10.2025</a:t>
             </a:fld>
             <a:endParaRPr lang="de-DE"/>
           </a:p>
@@ -8530,7 +8530,7 @@
           <a:p>
             <a:fld id="{AB5B7BA8-EC9D-4768-84BF-EB4326C38B13}" type="datetimeFigureOut">
               <a:rPr lang="pt-BR" smtClean="0"/>
-              <a:t>14/10/2025</a:t>
+              <a:t>28/10/2025</a:t>
             </a:fld>
             <a:endParaRPr lang="pt-BR"/>
           </a:p>
@@ -8795,7 +8795,7 @@
           <a:p>
             <a:fld id="{F0E51C7C-CEA3-4CAA-BE4B-344879E7C377}" type="datetimeFigureOut">
               <a:rPr lang="de-DE" smtClean="0"/>
-              <a:t>14.10.2025</a:t>
+              <a:t>28.10.2025</a:t>
             </a:fld>
             <a:endParaRPr lang="de-DE"/>
           </a:p>
@@ -8965,7 +8965,7 @@
           <a:p>
             <a:fld id="{F0E51C7C-CEA3-4CAA-BE4B-344879E7C377}" type="datetimeFigureOut">
               <a:rPr lang="de-DE" smtClean="0"/>
-              <a:t>14.10.2025</a:t>
+              <a:t>28.10.2025</a:t>
             </a:fld>
             <a:endParaRPr lang="de-DE"/>
           </a:p>
@@ -9145,7 +9145,7 @@
           <a:p>
             <a:fld id="{F0E51C7C-CEA3-4CAA-BE4B-344879E7C377}" type="datetimeFigureOut">
               <a:rPr lang="de-DE" smtClean="0"/>
-              <a:t>14.10.2025</a:t>
+              <a:t>28.10.2025</a:t>
             </a:fld>
             <a:endParaRPr lang="de-DE"/>
           </a:p>
@@ -9408,7 +9408,7 @@
           <a:p>
             <a:fld id="{AB5B7BA8-EC9D-4768-84BF-EB4326C38B13}" type="datetimeFigureOut">
               <a:rPr lang="pt-BR" smtClean="0"/>
-              <a:t>14/10/2025</a:t>
+              <a:t>28/10/2025</a:t>
             </a:fld>
             <a:endParaRPr lang="pt-BR"/>
           </a:p>
@@ -9673,7 +9673,7 @@
           <a:p>
             <a:fld id="{AB5B7BA8-EC9D-4768-84BF-EB4326C38B13}" type="datetimeFigureOut">
               <a:rPr lang="pt-BR" smtClean="0"/>
-              <a:t>14/10/2025</a:t>
+              <a:t>28/10/2025</a:t>
             </a:fld>
             <a:endParaRPr lang="pt-BR"/>
           </a:p>
@@ -10085,7 +10085,7 @@
           <a:p>
             <a:fld id="{AB5B7BA8-EC9D-4768-84BF-EB4326C38B13}" type="datetimeFigureOut">
               <a:rPr lang="pt-BR" smtClean="0"/>
-              <a:t>14/10/2025</a:t>
+              <a:t>28/10/2025</a:t>
             </a:fld>
             <a:endParaRPr lang="pt-BR"/>
           </a:p>
@@ -10226,7 +10226,7 @@
           <a:p>
             <a:fld id="{AB5B7BA8-EC9D-4768-84BF-EB4326C38B13}" type="datetimeFigureOut">
               <a:rPr lang="pt-BR" smtClean="0"/>
-              <a:t>14/10/2025</a:t>
+              <a:t>28/10/2025</a:t>
             </a:fld>
             <a:endParaRPr lang="pt-BR"/>
           </a:p>
@@ -10339,7 +10339,7 @@
           <a:p>
             <a:fld id="{AB5B7BA8-EC9D-4768-84BF-EB4326C38B13}" type="datetimeFigureOut">
               <a:rPr lang="pt-BR" smtClean="0"/>
-              <a:t>14/10/2025</a:t>
+              <a:t>28/10/2025</a:t>
             </a:fld>
             <a:endParaRPr lang="pt-BR"/>
           </a:p>
@@ -10650,7 +10650,7 @@
           <a:p>
             <a:fld id="{AB5B7BA8-EC9D-4768-84BF-EB4326C38B13}" type="datetimeFigureOut">
               <a:rPr lang="pt-BR" smtClean="0"/>
-              <a:t>14/10/2025</a:t>
+              <a:t>28/10/2025</a:t>
             </a:fld>
             <a:endParaRPr lang="pt-BR"/>
           </a:p>
@@ -10938,7 +10938,7 @@
           <a:p>
             <a:fld id="{AB5B7BA8-EC9D-4768-84BF-EB4326C38B13}" type="datetimeFigureOut">
               <a:rPr lang="pt-BR" smtClean="0"/>
-              <a:t>14/10/2025</a:t>
+              <a:t>28/10/2025</a:t>
             </a:fld>
             <a:endParaRPr lang="pt-BR"/>
           </a:p>
@@ -11179,7 +11179,7 @@
           <a:p>
             <a:fld id="{AB5B7BA8-EC9D-4768-84BF-EB4326C38B13}" type="datetimeFigureOut">
               <a:rPr lang="pt-BR" smtClean="0"/>
-              <a:t>14/10/2025</a:t>
+              <a:t>28/10/2025</a:t>
             </a:fld>
             <a:endParaRPr lang="pt-BR"/>
           </a:p>
@@ -11731,7 +11731,7 @@
           <a:p>
             <a:fld id="{F0E51C7C-CEA3-4CAA-BE4B-344879E7C377}" type="datetimeFigureOut">
               <a:rPr lang="de-DE" smtClean="0"/>
-              <a:t>14.10.2025</a:t>
+              <a:t>28.10.2025</a:t>
             </a:fld>
             <a:endParaRPr lang="de-DE"/>
           </a:p>
@@ -12747,7 +12747,7 @@
         </p:spPr>
         <p:txBody>
           <a:bodyPr>
-            <a:normAutofit/>
+            <a:normAutofit fontScale="92500" lnSpcReduction="10000"/>
           </a:bodyPr>
           <a:lstStyle/>
           <a:p>
@@ -13541,7 +13541,7 @@
         </p:spPr>
         <p:txBody>
           <a:bodyPr>
-            <a:normAutofit/>
+            <a:normAutofit fontScale="92500" lnSpcReduction="10000"/>
           </a:bodyPr>
           <a:lstStyle/>
           <a:p>
@@ -14979,7 +14979,7 @@
         </p:spPr>
         <p:txBody>
           <a:bodyPr vert="horz" lIns="91440" tIns="45720" rIns="91440" bIns="45720" rtlCol="0" anchor="t">
-            <a:normAutofit/>
+            <a:normAutofit fontScale="92500"/>
           </a:bodyPr>
           <a:lstStyle>
             <a:lvl1pPr marL="228600" indent="-228600" algn="l" defTabSz="914400" rtl="0" eaLnBrk="1" latinLnBrk="0" hangingPunct="1">
@@ -15362,36 +15362,6 @@
           </a:prstGeom>
         </p:spPr>
       </p:pic>
-      <p:pic>
-        <p:nvPicPr>
-          <p:cNvPr id="6" name="Imagem 5">
-            <a:extLst>
-              <a:ext uri="{FF2B5EF4-FFF2-40B4-BE49-F238E27FC236}">
-                <a16:creationId xmlns:a16="http://schemas.microsoft.com/office/drawing/2014/main" id="{4C667E6F-BC80-2483-08BF-ABBE62E3215D}"/>
-              </a:ext>
-            </a:extLst>
-          </p:cNvPr>
-          <p:cNvPicPr>
-            <a:picLocks noChangeAspect="1"/>
-          </p:cNvPicPr>
-          <p:nvPr/>
-        </p:nvPicPr>
-        <p:blipFill>
-          <a:blip r:embed="rId3"/>
-          <a:stretch>
-            <a:fillRect/>
-          </a:stretch>
-        </p:blipFill>
-        <p:spPr>
-          <a:xfrm>
-            <a:off x="6594300" y="2585688"/>
-            <a:ext cx="3503583" cy="2524114"/>
-          </a:xfrm>
-          <a:prstGeom prst="rect">
-            <a:avLst/>
-          </a:prstGeom>
-        </p:spPr>
-      </p:pic>
       <p:sp>
         <p:nvSpPr>
           <p:cNvPr id="11" name="Content Placeholder 2">
@@ -15670,6 +15640,42 @@
           </a:p>
         </p:txBody>
       </p:sp>
+      <p:pic>
+        <p:nvPicPr>
+          <p:cNvPr id="8" name="Imagem 7">
+            <a:extLst>
+              <a:ext uri="{FF2B5EF4-FFF2-40B4-BE49-F238E27FC236}">
+                <a16:creationId xmlns:a16="http://schemas.microsoft.com/office/drawing/2014/main" id="{C0980247-47FE-6202-4D71-4D51B292CAA2}"/>
+              </a:ext>
+            </a:extLst>
+          </p:cNvPr>
+          <p:cNvPicPr>
+            <a:picLocks noChangeAspect="1"/>
+          </p:cNvPicPr>
+          <p:nvPr/>
+        </p:nvPicPr>
+        <p:blipFill>
+          <a:blip r:embed="rId3">
+            <a:extLst>
+              <a:ext uri="{28A0092B-C50C-407E-A947-70E740481C1C}">
+                <a14:useLocalDpi xmlns:a14="http://schemas.microsoft.com/office/drawing/2010/main" val="0"/>
+              </a:ext>
+            </a:extLst>
+          </a:blip>
+          <a:stretch>
+            <a:fillRect/>
+          </a:stretch>
+        </p:blipFill>
+        <p:spPr>
+          <a:xfrm>
+            <a:off x="6667500" y="2063383"/>
+            <a:ext cx="4352925" cy="2536939"/>
+          </a:xfrm>
+          <a:prstGeom prst="rect">
+            <a:avLst/>
+          </a:prstGeom>
+        </p:spPr>
+      </p:pic>
     </p:spTree>
     <p:extLst>
       <p:ext uri="{BB962C8B-B14F-4D97-AF65-F5344CB8AC3E}">
